--- a/word-drafts/figures/Observability-Fig2-AddressSpace.pptx
+++ b/word-drafts/figures/Observability-Fig2-AddressSpace.pptx
@@ -7,7 +7,7 @@
   <p:sldIdLst>
     <p:sldId id="256" r:id="rId7"/>
   </p:sldIdLst>
-  <p:sldSz cx="21374100" cy="3429000" type="screen4x3"/>
+  <p:sldSz cx="11087100" cy="7029450" type="screen4x3"/>
   <p:notesSz cx="6858000" cy="9144000"/>
   <p:defaultTextStyle>
     <a:defPPr>
@@ -3096,8 +3096,8 @@
         </p:nvSpPr>
         <p:spPr>
           <a:xfrm>
-            <a:off x="76200" y="76200"/>
-            <a:ext cx="21221700" cy="2190750"/>
+            <a:off x="247650" y="762000"/>
+            <a:ext cx="8020050" cy="6019800"/>
           </a:xfrm>
           <a:prstGeom prst="roundRect">
             <a:avLst/>
@@ -3149,8 +3149,8 @@
         </p:nvSpPr>
         <p:spPr>
           <a:xfrm>
-            <a:off x="18764250" y="76200"/>
-            <a:ext cx="2533650" cy="2190750"/>
+            <a:off x="419100" y="3333750"/>
+            <a:ext cx="7677150" cy="2190750"/>
           </a:xfrm>
           <a:prstGeom prst="roundRect">
             <a:avLst/>
@@ -3202,7 +3202,7 @@
         </p:nvSpPr>
         <p:spPr>
           <a:xfrm>
-            <a:off x="18935700" y="476250"/>
+            <a:off x="1876425" y="1562100"/>
             <a:ext cx="2190750" cy="533400"/>
           </a:xfrm>
           <a:prstGeom prst="rect">
@@ -3255,7 +3255,7 @@
         </p:nvSpPr>
         <p:spPr>
           <a:xfrm>
-            <a:off x="247650" y="1562100"/>
+            <a:off x="3162300" y="2647950"/>
             <a:ext cx="2190750" cy="533400"/>
           </a:xfrm>
           <a:prstGeom prst="rect">
@@ -3319,7 +3319,7 @@
         </p:nvSpPr>
         <p:spPr>
           <a:xfrm>
-            <a:off x="18935700" y="476250"/>
+            <a:off x="3162300" y="3733800"/>
             <a:ext cx="2190750" cy="533400"/>
           </a:xfrm>
           <a:prstGeom prst="rect">
@@ -3394,7 +3394,7 @@
         </p:nvSpPr>
         <p:spPr>
           <a:xfrm>
-            <a:off x="18935700" y="1562100"/>
+            <a:off x="590550" y="4819650"/>
             <a:ext cx="2190750" cy="533400"/>
           </a:xfrm>
           <a:prstGeom prst="rect">
@@ -3458,7 +3458,7 @@
         </p:nvSpPr>
         <p:spPr>
           <a:xfrm>
-            <a:off x="18935700" y="1562100"/>
+            <a:off x="3162300" y="4819650"/>
             <a:ext cx="2190750" cy="533400"/>
           </a:xfrm>
           <a:prstGeom prst="rect">
@@ -3511,7 +3511,7 @@
         </p:nvSpPr>
         <p:spPr>
           <a:xfrm>
-            <a:off x="18935700" y="1562100"/>
+            <a:off x="5734050" y="4819650"/>
             <a:ext cx="2190750" cy="533400"/>
           </a:xfrm>
           <a:prstGeom prst="rect">
@@ -3564,7 +3564,7 @@
         </p:nvSpPr>
         <p:spPr>
           <a:xfrm>
-            <a:off x="18935700" y="476250"/>
+            <a:off x="3162300" y="5905500"/>
             <a:ext cx="2190750" cy="533400"/>
           </a:xfrm>
           <a:prstGeom prst="rect">
@@ -3628,7 +3628,7 @@
         </p:nvSpPr>
         <p:spPr>
           <a:xfrm>
-            <a:off x="18935700" y="476250"/>
+            <a:off x="8648700" y="476250"/>
             <a:ext cx="2190750" cy="533400"/>
           </a:xfrm>
           <a:prstGeom prst="rect">
@@ -3681,7 +3681,7 @@
         </p:nvSpPr>
         <p:spPr>
           <a:xfrm>
-            <a:off x="18935700" y="1562100"/>
+            <a:off x="8648700" y="1562100"/>
             <a:ext cx="2190750" cy="533400"/>
           </a:xfrm>
           <a:prstGeom prst="rect">
@@ -3726,168 +3726,9 @@
           </a:p>
         </p:txBody>
       </p:sp>
-      <p:sp>
-        <p:nvSpPr>
-          <p:cNvPr id="13" name="Rectangle 12"/>
-          <p:cNvSpPr/>
-          <p:nvPr/>
-        </p:nvSpPr>
-        <p:spPr>
-          <a:xfrm>
-            <a:off x="5391150" y="2647950"/>
-            <a:ext cx="2190750" cy="533400"/>
-          </a:xfrm>
-          <a:prstGeom prst="rect">
-            <a:avLst/>
-          </a:prstGeom>
-          <a:solidFill>
-            <a:srgbClr val="EEF3FA"/>
-          </a:solidFill>
-          <a:ln w="12700">
-            <a:solidFill>
-              <a:srgbClr val="444444"/>
-            </a:solidFill>
-          </a:ln>
-        </p:spPr>
-        <p:style>
-          <a:lnRef idx="1">
-            <a:schemeClr val="accent1"/>
-          </a:lnRef>
-          <a:fillRef idx="3">
-            <a:schemeClr val="accent1"/>
-          </a:fillRef>
-          <a:effectRef idx="2">
-            <a:schemeClr val="accent1"/>
-          </a:effectRef>
-          <a:fontRef idx="minor">
-            <a:schemeClr val="lt1"/>
-          </a:fontRef>
-        </p:style>
-        <p:txBody>
-          <a:bodyPr rtlCol="0" anchor="ctr" wrap="square"/>
-          <a:lstStyle/>
-          <a:p>
-            <a:pPr algn="ctr"/>
-            <a:r>
-              <a:rPr sz="900">
-                <a:solidFill>
-                  <a:srgbClr val="111111"/>
-                </a:solidFill>
-              </a:rPr>
-              <a:t>|Collects| G</a:t>
-            </a:r>
-          </a:p>
-        </p:txBody>
-      </p:sp>
-      <p:sp>
-        <p:nvSpPr>
-          <p:cNvPr id="14" name="Rectangle 13"/>
-          <p:cNvSpPr/>
-          <p:nvPr/>
-        </p:nvSpPr>
-        <p:spPr>
-          <a:xfrm>
-            <a:off x="7962900" y="2647950"/>
-            <a:ext cx="2190750" cy="533400"/>
-          </a:xfrm>
-          <a:prstGeom prst="rect">
-            <a:avLst/>
-          </a:prstGeom>
-          <a:solidFill>
-            <a:srgbClr val="EEF3FA"/>
-          </a:solidFill>
-          <a:ln w="12700">
-            <a:solidFill>
-              <a:srgbClr val="444444"/>
-            </a:solidFill>
-          </a:ln>
-        </p:spPr>
-        <p:style>
-          <a:lnRef idx="1">
-            <a:schemeClr val="accent1"/>
-          </a:lnRef>
-          <a:fillRef idx="3">
-            <a:schemeClr val="accent1"/>
-          </a:fillRef>
-          <a:effectRef idx="2">
-            <a:schemeClr val="accent1"/>
-          </a:effectRef>
-          <a:fontRef idx="minor">
-            <a:schemeClr val="lt1"/>
-          </a:fontRef>
-        </p:style>
-        <p:txBody>
-          <a:bodyPr rtlCol="0" anchor="ctr" wrap="square"/>
-          <a:lstStyle/>
-          <a:p>
-            <a:pPr algn="ctr"/>
-            <a:r>
-              <a:rPr sz="900">
-                <a:solidFill>
-                  <a:srgbClr val="111111"/>
-                </a:solidFill>
-              </a:rPr>
-              <a:t>|ExportedBy opt.| PDS</a:t>
-            </a:r>
-          </a:p>
-        </p:txBody>
-      </p:sp>
-      <p:sp>
-        <p:nvSpPr>
-          <p:cNvPr id="15" name="Rectangle 14"/>
-          <p:cNvSpPr/>
-          <p:nvPr/>
-        </p:nvSpPr>
-        <p:spPr>
-          <a:xfrm>
-            <a:off x="18935700" y="1562100"/>
-            <a:ext cx="2190750" cy="533400"/>
-          </a:xfrm>
-          <a:prstGeom prst="rect">
-            <a:avLst/>
-          </a:prstGeom>
-          <a:solidFill>
-            <a:srgbClr val="EEF3FA"/>
-          </a:solidFill>
-          <a:ln w="12700">
-            <a:solidFill>
-              <a:srgbClr val="444444"/>
-            </a:solidFill>
-          </a:ln>
-        </p:spPr>
-        <p:style>
-          <a:lnRef idx="1">
-            <a:schemeClr val="accent1"/>
-          </a:lnRef>
-          <a:fillRef idx="3">
-            <a:schemeClr val="accent1"/>
-          </a:fillRef>
-          <a:effectRef idx="2">
-            <a:schemeClr val="accent1"/>
-          </a:effectRef>
-          <a:fontRef idx="minor">
-            <a:schemeClr val="lt1"/>
-          </a:fontRef>
-        </p:style>
-        <p:txBody>
-          <a:bodyPr rtlCol="0" anchor="ctr" wrap="square"/>
-          <a:lstStyle/>
-          <a:p>
-            <a:pPr algn="ctr"/>
-            <a:r>
-              <a:rPr sz="900">
-                <a:solidFill>
-                  <a:srgbClr val="111111"/>
-                </a:solidFill>
-              </a:rPr>
-              <a:t>Server</a:t>
-            </a:r>
-          </a:p>
-        </p:txBody>
-      </p:sp>
       <p:cxnSp>
         <p:nvCxnSpPr>
-          <p:cNvPr id="16" name="Connector 15"/>
+          <p:cNvPr id="13" name="Connector 12"/>
           <p:cNvCxnSpPr>
             <a:stCxn id="4" idx="2"/>
             <a:endCxn id="5" idx="0"/>
@@ -3895,9 +3736,9 @@
           <p:nvPr/>
         </p:nvCxnSpPr>
         <p:spPr>
-          <a:xfrm flipH="1">
-            <a:off x="1343025" y="1009650"/>
-            <a:ext cx="18688050" cy="552450"/>
+          <a:xfrm>
+            <a:off x="2971800" y="2095500"/>
+            <a:ext cx="1285875" cy="552450"/>
           </a:xfrm>
           <a:prstGeom prst="line">
             <a:avLst/>
@@ -3923,19 +3764,124 @@
           </a:fontRef>
         </p:style>
       </p:cxnSp>
+      <p:sp>
+        <p:nvSpPr>
+          <p:cNvPr id="14" name="TextBox 13"/>
+          <p:cNvSpPr txBox="1"/>
+          <p:nvPr/>
+        </p:nvSpPr>
+        <p:spPr>
+          <a:xfrm>
+            <a:off x="3652837" y="2314575"/>
+            <a:ext cx="619125" cy="123825"/>
+          </a:xfrm>
+          <a:prstGeom prst="rect">
+            <a:avLst/>
+          </a:prstGeom>
+          <a:noFill/>
+        </p:spPr>
+        <p:txBody>
+          <a:bodyPr wrap="none" lIns="0" rIns="0" tIns="0" bIns="0">
+            <a:spAutoFit/>
+          </a:bodyPr>
+          <a:lstStyle/>
+          <a:p>
+            <a:r>
+              <a:rPr sz="800">
+                <a:solidFill>
+                  <a:srgbClr val="444444"/>
+                </a:solidFill>
+              </a:rPr>
+              <a:t>HasComponent</a:t>
+            </a:r>
+          </a:p>
+        </p:txBody>
+      </p:sp>
+      <p:cxnSp>
+        <p:nvCxnSpPr>
+          <p:cNvPr id="15" name="Connector 14"/>
+          <p:cNvCxnSpPr>
+            <a:stCxn id="5" idx="2"/>
+            <a:endCxn id="6" idx="0"/>
+          </p:cNvCxnSpPr>
+          <p:nvPr/>
+        </p:nvCxnSpPr>
+        <p:spPr>
+          <a:xfrm>
+            <a:off x="4257675" y="3181350"/>
+            <a:ext cx="0" cy="552450"/>
+          </a:xfrm>
+          <a:prstGeom prst="line">
+            <a:avLst/>
+          </a:prstGeom>
+          <a:ln w="12700">
+            <a:solidFill>
+              <a:srgbClr val="444444"/>
+            </a:solidFill>
+            <a:prstDash val="dash"/>
+          </a:ln>
+        </p:spPr>
+        <p:style>
+          <a:lnRef idx="2">
+            <a:schemeClr val="accent1"/>
+          </a:lnRef>
+          <a:fillRef idx="0">
+            <a:schemeClr val="accent1"/>
+          </a:fillRef>
+          <a:effectRef idx="1">
+            <a:schemeClr val="accent1"/>
+          </a:effectRef>
+          <a:fontRef idx="minor">
+            <a:schemeClr val="tx1"/>
+          </a:fontRef>
+        </p:style>
+      </p:cxnSp>
+      <p:sp>
+        <p:nvSpPr>
+          <p:cNvPr id="16" name="TextBox 15"/>
+          <p:cNvSpPr txBox="1"/>
+          <p:nvPr/>
+        </p:nvSpPr>
+        <p:spPr>
+          <a:xfrm>
+            <a:off x="4295775" y="3400425"/>
+            <a:ext cx="352425" cy="123825"/>
+          </a:xfrm>
+          <a:prstGeom prst="rect">
+            <a:avLst/>
+          </a:prstGeom>
+          <a:noFill/>
+        </p:spPr>
+        <p:txBody>
+          <a:bodyPr wrap="none" lIns="0" rIns="0" tIns="0" bIns="0">
+            <a:spAutoFit/>
+          </a:bodyPr>
+          <a:lstStyle/>
+          <a:p>
+            <a:r>
+              <a:rPr sz="800">
+                <a:solidFill>
+                  <a:srgbClr val="444444"/>
+                </a:solidFill>
+              </a:rPr>
+              <a:t>Collects</a:t>
+            </a:r>
+          </a:p>
+        </p:txBody>
+      </p:sp>
       <p:cxnSp>
         <p:nvCxnSpPr>
           <p:cNvPr id="17" name="Connector 16"/>
           <p:cNvCxnSpPr>
-            <a:stCxn id="5" idx="2"/>
-            <a:endCxn id="13" idx="0"/>
+            <a:stCxn id="6" idx="2"/>
+            <a:endCxn id="7" idx="0"/>
           </p:cNvCxnSpPr>
           <p:nvPr/>
         </p:nvCxnSpPr>
         <p:spPr>
-          <a:xfrm>
-            <a:off x="1343025" y="2095500"/>
-            <a:ext cx="5143500" cy="552450"/>
+          <a:xfrm flipH="1">
+            <a:off x="1685925" y="4267200"/>
+            <a:ext cx="2571750" cy="552450"/>
           </a:xfrm>
           <a:prstGeom prst="line">
             <a:avLst/>
@@ -3961,44 +3907,39 @@
           </a:fontRef>
         </p:style>
       </p:cxnSp>
-      <p:cxnSp>
-        <p:nvCxnSpPr>
-          <p:cNvPr id="18" name="Connector 17"/>
-          <p:cNvCxnSpPr>
-            <a:stCxn id="6" idx="2"/>
-            <a:endCxn id="7" idx="0"/>
-          </p:cNvCxnSpPr>
+      <p:sp>
+        <p:nvSpPr>
+          <p:cNvPr id="18" name="TextBox 17"/>
+          <p:cNvSpPr txBox="1"/>
           <p:nvPr/>
-        </p:nvCxnSpPr>
+        </p:nvSpPr>
         <p:spPr>
           <a:xfrm>
-            <a:off x="20031075" y="1009650"/>
-            <a:ext cx="0" cy="552450"/>
-          </a:xfrm>
-          <a:prstGeom prst="line">
+            <a:off x="3009900" y="4486275"/>
+            <a:ext cx="619125" cy="123825"/>
+          </a:xfrm>
+          <a:prstGeom prst="rect">
             <a:avLst/>
           </a:prstGeom>
-          <a:ln w="12700">
-            <a:solidFill>
-              <a:srgbClr val="444444"/>
-            </a:solidFill>
-          </a:ln>
-        </p:spPr>
-        <p:style>
-          <a:lnRef idx="2">
-            <a:schemeClr val="accent1"/>
-          </a:lnRef>
-          <a:fillRef idx="0">
-            <a:schemeClr val="accent1"/>
-          </a:fillRef>
-          <a:effectRef idx="1">
-            <a:schemeClr val="accent1"/>
-          </a:effectRef>
-          <a:fontRef idx="minor">
-            <a:schemeClr val="tx1"/>
-          </a:fontRef>
-        </p:style>
-      </p:cxnSp>
+          <a:noFill/>
+        </p:spPr>
+        <p:txBody>
+          <a:bodyPr wrap="none" lIns="0" rIns="0" tIns="0" bIns="0">
+            <a:spAutoFit/>
+          </a:bodyPr>
+          <a:lstStyle/>
+          <a:p>
+            <a:r>
+              <a:rPr sz="800">
+                <a:solidFill>
+                  <a:srgbClr val="444444"/>
+                </a:solidFill>
+              </a:rPr>
+              <a:t>HasComponent</a:t>
+            </a:r>
+          </a:p>
+        </p:txBody>
+      </p:sp>
       <p:cxnSp>
         <p:nvCxnSpPr>
           <p:cNvPr id="19" name="Connector 18"/>
@@ -4010,7 +3951,7 @@
         </p:nvCxnSpPr>
         <p:spPr>
           <a:xfrm>
-            <a:off x="20031075" y="1009650"/>
+            <a:off x="4257675" y="4267200"/>
             <a:ext cx="0" cy="552450"/>
           </a:xfrm>
           <a:prstGeom prst="line">
@@ -4048,8 +3989,8 @@
         </p:nvCxnSpPr>
         <p:spPr>
           <a:xfrm>
-            <a:off x="20031075" y="1009650"/>
-            <a:ext cx="0" cy="552450"/>
+            <a:off x="4257675" y="4267200"/>
+            <a:ext cx="2571750" cy="552450"/>
           </a:xfrm>
           <a:prstGeom prst="line">
             <a:avLst/>
@@ -4080,14 +4021,86 @@
           <p:cNvPr id="21" name="Connector 20"/>
           <p:cNvCxnSpPr>
             <a:stCxn id="7" idx="2"/>
-            <a:endCxn id="14" idx="0"/>
+            <a:endCxn id="10" idx="0"/>
           </p:cNvCxnSpPr>
           <p:nvPr/>
         </p:nvCxnSpPr>
         <p:spPr>
+          <a:xfrm>
+            <a:off x="1685925" y="5353050"/>
+            <a:ext cx="2571750" cy="552450"/>
+          </a:xfrm>
+          <a:prstGeom prst="line">
+            <a:avLst/>
+          </a:prstGeom>
+          <a:ln w="12700">
+            <a:solidFill>
+              <a:srgbClr val="444444"/>
+            </a:solidFill>
+            <a:prstDash val="dash"/>
+          </a:ln>
+        </p:spPr>
+        <p:style>
+          <a:lnRef idx="2">
+            <a:schemeClr val="accent1"/>
+          </a:lnRef>
+          <a:fillRef idx="0">
+            <a:schemeClr val="accent1"/>
+          </a:fillRef>
+          <a:effectRef idx="1">
+            <a:schemeClr val="accent1"/>
+          </a:effectRef>
+          <a:fontRef idx="minor">
+            <a:schemeClr val="tx1"/>
+          </a:fontRef>
+        </p:style>
+      </p:cxnSp>
+      <p:sp>
+        <p:nvSpPr>
+          <p:cNvPr id="22" name="TextBox 21"/>
+          <p:cNvSpPr txBox="1"/>
+          <p:nvPr/>
+        </p:nvSpPr>
+        <p:spPr>
+          <a:xfrm>
+            <a:off x="3009900" y="5572125"/>
+            <a:ext cx="638175" cy="123825"/>
+          </a:xfrm>
+          <a:prstGeom prst="rect">
+            <a:avLst/>
+          </a:prstGeom>
+          <a:noFill/>
+        </p:spPr>
+        <p:txBody>
+          <a:bodyPr wrap="none" lIns="0" rIns="0" tIns="0" bIns="0">
+            <a:spAutoFit/>
+          </a:bodyPr>
+          <a:lstStyle/>
+          <a:p>
+            <a:r>
+              <a:rPr sz="800">
+                <a:solidFill>
+                  <a:srgbClr val="444444"/>
+                </a:solidFill>
+              </a:rPr>
+              <a:t>ExportedBy opt.</a:t>
+            </a:r>
+          </a:p>
+        </p:txBody>
+      </p:sp>
+      <p:cxnSp>
+        <p:nvCxnSpPr>
+          <p:cNvPr id="23" name="Connector 22"/>
+          <p:cNvCxnSpPr>
+            <a:stCxn id="11" idx="2"/>
+            <a:endCxn id="5" idx="0"/>
+          </p:cNvCxnSpPr>
+          <p:nvPr/>
+        </p:nvCxnSpPr>
+        <p:spPr>
           <a:xfrm flipH="1">
-            <a:off x="9058275" y="2095500"/>
-            <a:ext cx="10972800" cy="552450"/>
+            <a:off x="4257675" y="1009650"/>
+            <a:ext cx="5486400" cy="1638300"/>
           </a:xfrm>
           <a:prstGeom prst="line">
             <a:avLst/>
@@ -4113,19 +4126,52 @@
           </a:fontRef>
         </p:style>
       </p:cxnSp>
+      <p:sp>
+        <p:nvSpPr>
+          <p:cNvPr id="24" name="TextBox 23"/>
+          <p:cNvSpPr txBox="1"/>
+          <p:nvPr/>
+        </p:nvSpPr>
+        <p:spPr>
+          <a:xfrm>
+            <a:off x="7038975" y="1771650"/>
+            <a:ext cx="1028700" cy="123825"/>
+          </a:xfrm>
+          <a:prstGeom prst="rect">
+            <a:avLst/>
+          </a:prstGeom>
+          <a:noFill/>
+        </p:spPr>
+        <p:txBody>
+          <a:bodyPr wrap="none" lIns="0" rIns="0" tIns="0" bIns="0">
+            <a:spAutoFit/>
+          </a:bodyPr>
+          <a:lstStyle/>
+          <a:p>
+            <a:r>
+              <a:rPr sz="800">
+                <a:solidFill>
+                  <a:srgbClr val="444444"/>
+                </a:solidFill>
+              </a:rPr>
+              <a:t>Browse Server/Observability</a:t>
+            </a:r>
+          </a:p>
+        </p:txBody>
+      </p:sp>
       <p:cxnSp>
         <p:nvCxnSpPr>
-          <p:cNvPr id="22" name="Connector 21"/>
+          <p:cNvPr id="25" name="Connector 24"/>
           <p:cNvCxnSpPr>
             <a:stCxn id="11" idx="2"/>
-            <a:endCxn id="5" idx="0"/>
+            <a:endCxn id="4" idx="0"/>
           </p:cNvCxnSpPr>
           <p:nvPr/>
         </p:nvCxnSpPr>
         <p:spPr>
           <a:xfrm flipH="1">
-            <a:off x="1343025" y="1009650"/>
-            <a:ext cx="18688050" cy="552450"/>
+            <a:off x="2971800" y="1009650"/>
+            <a:ext cx="6772275" cy="552450"/>
           </a:xfrm>
           <a:prstGeom prst="line">
             <a:avLst/>
@@ -4151,18 +4197,51 @@
           </a:fontRef>
         </p:style>
       </p:cxnSp>
+      <p:sp>
+        <p:nvSpPr>
+          <p:cNvPr id="26" name="TextBox 25"/>
+          <p:cNvSpPr txBox="1"/>
+          <p:nvPr/>
+        </p:nvSpPr>
+        <p:spPr>
+          <a:xfrm>
+            <a:off x="6396037" y="1228725"/>
+            <a:ext cx="1390650" cy="123825"/>
+          </a:xfrm>
+          <a:prstGeom prst="rect">
+            <a:avLst/>
+          </a:prstGeom>
+          <a:noFill/>
+        </p:spPr>
+        <p:txBody>
+          <a:bodyPr wrap="none" lIns="0" rIns="0" tIns="0" bIns="0">
+            <a:spAutoFit/>
+          </a:bodyPr>
+          <a:lstStyle/>
+          <a:p>
+            <a:r>
+              <a:rPr sz="800">
+                <a:solidFill>
+                  <a:srgbClr val="444444"/>
+                </a:solidFill>
+              </a:rPr>
+              <a:t>Subscriptions/Reads or DataSetReader</a:t>
+            </a:r>
+          </a:p>
+        </p:txBody>
+      </p:sp>
       <p:cxnSp>
         <p:nvCxnSpPr>
-          <p:cNvPr id="23" name="Connector 22"/>
+          <p:cNvPr id="27" name="Connector 26"/>
           <p:cNvCxnSpPr>
             <a:stCxn id="11" idx="2"/>
-            <a:endCxn id="15" idx="0"/>
+            <a:endCxn id="12" idx="0"/>
           </p:cNvCxnSpPr>
           <p:nvPr/>
         </p:nvCxnSpPr>
         <p:spPr>
           <a:xfrm>
-            <a:off x="20031075" y="1009650"/>
+            <a:off x="9744075" y="1009650"/>
             <a:ext cx="0" cy="552450"/>
           </a:xfrm>
           <a:prstGeom prst="line">
@@ -4189,44 +4268,39 @@
           </a:fontRef>
         </p:style>
       </p:cxnSp>
-      <p:cxnSp>
-        <p:nvCxnSpPr>
-          <p:cNvPr id="24" name="Connector 23"/>
-          <p:cNvCxnSpPr>
-            <a:stCxn id="11" idx="2"/>
-            <a:endCxn id="12" idx="0"/>
-          </p:cNvCxnSpPr>
+      <p:sp>
+        <p:nvSpPr>
+          <p:cNvPr id="28" name="TextBox 27"/>
+          <p:cNvSpPr txBox="1"/>
           <p:nvPr/>
-        </p:nvCxnSpPr>
+        </p:nvSpPr>
         <p:spPr>
           <a:xfrm>
-            <a:off x="20031075" y="1009650"/>
-            <a:ext cx="0" cy="552450"/>
-          </a:xfrm>
-          <a:prstGeom prst="line">
+            <a:off x="9782175" y="1228725"/>
+            <a:ext cx="923925" cy="123825"/>
+          </a:xfrm>
+          <a:prstGeom prst="rect">
             <a:avLst/>
           </a:prstGeom>
-          <a:ln w="12700">
-            <a:solidFill>
-              <a:srgbClr val="444444"/>
-            </a:solidFill>
-          </a:ln>
-        </p:spPr>
-        <p:style>
-          <a:lnRef idx="2">
-            <a:schemeClr val="accent1"/>
-          </a:lnRef>
-          <a:fillRef idx="0">
-            <a:schemeClr val="accent1"/>
-          </a:fillRef>
-          <a:effectRef idx="1">
-            <a:schemeClr val="accent1"/>
-          </a:effectRef>
-          <a:fontRef idx="minor">
-            <a:schemeClr val="tx1"/>
-          </a:fontRef>
-        </p:style>
-      </p:cxnSp>
+          <a:noFill/>
+        </p:spPr>
+        <p:txBody>
+          <a:bodyPr wrap="none" lIns="0" rIns="0" tIns="0" bIns="0">
+            <a:spAutoFit/>
+          </a:bodyPr>
+          <a:lstStyle/>
+          <a:p>
+            <a:r>
+              <a:rPr sz="800">
+                <a:solidFill>
+                  <a:srgbClr val="444444"/>
+                </a:solidFill>
+              </a:rPr>
+              <a:t>OTLP metrics/logs/traces</a:t>
+            </a:r>
+          </a:p>
+        </p:txBody>
+      </p:sp>
     </p:spTree>
   </p:cSld>
   <p:clrMapOvr>

--- a/word-drafts/figures/Observability-Fig2-AddressSpace.pptx
+++ b/word-drafts/figures/Observability-Fig2-AddressSpace.pptx
@@ -7,7 +7,7 @@
   <p:sldIdLst>
     <p:sldId id="256" r:id="rId7"/>
   </p:sldIdLst>
-  <p:sldSz cx="11087100" cy="7029450" type="screen4x3"/>
+  <p:sldSz cx="11096625" cy="7029450" type="screen4x3"/>
   <p:notesSz cx="6858000" cy="9144000"/>
   <p:defaultTextStyle>
     <a:defPPr>
@@ -3773,7 +3773,7 @@
         <p:spPr>
           <a:xfrm>
             <a:off x="3652837" y="2314575"/>
-            <a:ext cx="619125" cy="123825"/>
+            <a:ext cx="762000" cy="123825"/>
           </a:xfrm>
           <a:prstGeom prst="rect">
             <a:avLst/>
@@ -3845,7 +3845,7 @@
         <p:spPr>
           <a:xfrm>
             <a:off x="4295775" y="3400425"/>
-            <a:ext cx="352425" cy="123825"/>
+            <a:ext cx="419100" cy="123825"/>
           </a:xfrm>
           <a:prstGeom prst="rect">
             <a:avLst/>
@@ -3916,7 +3916,7 @@
         <p:spPr>
           <a:xfrm>
             <a:off x="3009900" y="4486275"/>
-            <a:ext cx="619125" cy="123825"/>
+            <a:ext cx="762000" cy="123825"/>
           </a:xfrm>
           <a:prstGeom prst="rect">
             <a:avLst/>
@@ -4064,7 +4064,7 @@
         <p:spPr>
           <a:xfrm>
             <a:off x="3009900" y="5572125"/>
-            <a:ext cx="638175" cy="123825"/>
+            <a:ext cx="742950" cy="123825"/>
           </a:xfrm>
           <a:prstGeom prst="rect">
             <a:avLst/>
@@ -4135,7 +4135,7 @@
         <p:spPr>
           <a:xfrm>
             <a:off x="7038975" y="1771650"/>
-            <a:ext cx="1028700" cy="123825"/>
+            <a:ext cx="1314450" cy="123825"/>
           </a:xfrm>
           <a:prstGeom prst="rect">
             <a:avLst/>
@@ -4206,7 +4206,7 @@
         <p:spPr>
           <a:xfrm>
             <a:off x="6396037" y="1228725"/>
-            <a:ext cx="1390650" cy="123825"/>
+            <a:ext cx="1733550" cy="123825"/>
           </a:xfrm>
           <a:prstGeom prst="rect">
             <a:avLst/>
@@ -4277,7 +4277,7 @@
         <p:spPr>
           <a:xfrm>
             <a:off x="9782175" y="1228725"/>
-            <a:ext cx="923925" cy="123825"/>
+            <a:ext cx="1143000" cy="123825"/>
           </a:xfrm>
           <a:prstGeom prst="rect">
             <a:avLst/>
